--- a/four_pop_vG1_prop/four_pop_vG1_prop.pptx
+++ b/four_pop_vG1_prop/four_pop_vG1_prop.pptx
@@ -7,6 +7,7 @@
   <p:sldIdLst>
     <p:sldId id="256" r:id="rId2"/>
     <p:sldId id="257" r:id="rId3"/>
+    <p:sldId id="258" r:id="rId4"/>
   </p:sldIdLst>
   <p:sldSz cx="12192000" cy="6858000"/>
   <p:notesSz cx="6858000" cy="9144000"/>
@@ -260,7 +261,7 @@
           <a:p>
             <a:fld id="{2225F40E-4D6A-4DF5-98D1-C5D2D280A6AC}" type="datetimeFigureOut">
               <a:rPr lang="en-US" smtClean="0"/>
-              <a:t>6/12/2025</a:t>
+              <a:t>8/23/2025</a:t>
             </a:fld>
             <a:endParaRPr lang="en-US"/>
           </a:p>
@@ -458,7 +459,7 @@
           <a:p>
             <a:fld id="{2225F40E-4D6A-4DF5-98D1-C5D2D280A6AC}" type="datetimeFigureOut">
               <a:rPr lang="en-US" smtClean="0"/>
-              <a:t>6/12/2025</a:t>
+              <a:t>8/23/2025</a:t>
             </a:fld>
             <a:endParaRPr lang="en-US"/>
           </a:p>
@@ -666,7 +667,7 @@
           <a:p>
             <a:fld id="{2225F40E-4D6A-4DF5-98D1-C5D2D280A6AC}" type="datetimeFigureOut">
               <a:rPr lang="en-US" smtClean="0"/>
-              <a:t>6/12/2025</a:t>
+              <a:t>8/23/2025</a:t>
             </a:fld>
             <a:endParaRPr lang="en-US"/>
           </a:p>
@@ -864,7 +865,7 @@
           <a:p>
             <a:fld id="{2225F40E-4D6A-4DF5-98D1-C5D2D280A6AC}" type="datetimeFigureOut">
               <a:rPr lang="en-US" smtClean="0"/>
-              <a:t>6/12/2025</a:t>
+              <a:t>8/23/2025</a:t>
             </a:fld>
             <a:endParaRPr lang="en-US"/>
           </a:p>
@@ -1139,7 +1140,7 @@
           <a:p>
             <a:fld id="{2225F40E-4D6A-4DF5-98D1-C5D2D280A6AC}" type="datetimeFigureOut">
               <a:rPr lang="en-US" smtClean="0"/>
-              <a:t>6/12/2025</a:t>
+              <a:t>8/23/2025</a:t>
             </a:fld>
             <a:endParaRPr lang="en-US"/>
           </a:p>
@@ -1404,7 +1405,7 @@
           <a:p>
             <a:fld id="{2225F40E-4D6A-4DF5-98D1-C5D2D280A6AC}" type="datetimeFigureOut">
               <a:rPr lang="en-US" smtClean="0"/>
-              <a:t>6/12/2025</a:t>
+              <a:t>8/23/2025</a:t>
             </a:fld>
             <a:endParaRPr lang="en-US"/>
           </a:p>
@@ -1816,7 +1817,7 @@
           <a:p>
             <a:fld id="{2225F40E-4D6A-4DF5-98D1-C5D2D280A6AC}" type="datetimeFigureOut">
               <a:rPr lang="en-US" smtClean="0"/>
-              <a:t>6/12/2025</a:t>
+              <a:t>8/23/2025</a:t>
             </a:fld>
             <a:endParaRPr lang="en-US"/>
           </a:p>
@@ -1957,7 +1958,7 @@
           <a:p>
             <a:fld id="{2225F40E-4D6A-4DF5-98D1-C5D2D280A6AC}" type="datetimeFigureOut">
               <a:rPr lang="en-US" smtClean="0"/>
-              <a:t>6/12/2025</a:t>
+              <a:t>8/23/2025</a:t>
             </a:fld>
             <a:endParaRPr lang="en-US"/>
           </a:p>
@@ -2070,7 +2071,7 @@
           <a:p>
             <a:fld id="{2225F40E-4D6A-4DF5-98D1-C5D2D280A6AC}" type="datetimeFigureOut">
               <a:rPr lang="en-US" smtClean="0"/>
-              <a:t>6/12/2025</a:t>
+              <a:t>8/23/2025</a:t>
             </a:fld>
             <a:endParaRPr lang="en-US"/>
           </a:p>
@@ -2381,7 +2382,7 @@
           <a:p>
             <a:fld id="{2225F40E-4D6A-4DF5-98D1-C5D2D280A6AC}" type="datetimeFigureOut">
               <a:rPr lang="en-US" smtClean="0"/>
-              <a:t>6/12/2025</a:t>
+              <a:t>8/23/2025</a:t>
             </a:fld>
             <a:endParaRPr lang="en-US"/>
           </a:p>
@@ -2669,7 +2670,7 @@
           <a:p>
             <a:fld id="{2225F40E-4D6A-4DF5-98D1-C5D2D280A6AC}" type="datetimeFigureOut">
               <a:rPr lang="en-US" smtClean="0"/>
-              <a:t>6/12/2025</a:t>
+              <a:t>8/23/2025</a:t>
             </a:fld>
             <a:endParaRPr lang="en-US"/>
           </a:p>
@@ -2910,7 +2911,7 @@
           <a:p>
             <a:fld id="{2225F40E-4D6A-4DF5-98D1-C5D2D280A6AC}" type="datetimeFigureOut">
               <a:rPr lang="en-US" smtClean="0"/>
-              <a:t>6/12/2025</a:t>
+              <a:t>8/23/2025</a:t>
             </a:fld>
             <a:endParaRPr lang="en-US"/>
           </a:p>
@@ -3750,6 +3751,851 @@
     <p:extLst>
       <p:ext uri="{BB962C8B-B14F-4D97-AF65-F5344CB8AC3E}">
         <p14:creationId xmlns:p14="http://schemas.microsoft.com/office/powerpoint/2010/main" val="2335241141"/>
+      </p:ext>
+    </p:extLst>
+  </p:cSld>
+  <p:clrMapOvr>
+    <a:masterClrMapping/>
+  </p:clrMapOvr>
+</p:sld>
+</file>
+
+<file path=ppt/slides/slide3.xml><?xml version="1.0" encoding="utf-8"?>
+<p:sld xmlns:a="http://schemas.openxmlformats.org/drawingml/2006/main" xmlns:r="http://schemas.openxmlformats.org/officeDocument/2006/relationships" xmlns:p="http://schemas.openxmlformats.org/presentationml/2006/main">
+  <p:cSld>
+    <p:spTree>
+      <p:nvGrpSpPr>
+        <p:cNvPr id="1" name="">
+          <a:extLst>
+            <a:ext uri="{FF2B5EF4-FFF2-40B4-BE49-F238E27FC236}">
+              <a16:creationId xmlns:a16="http://schemas.microsoft.com/office/drawing/2014/main" id="{38F1B25D-D850-673D-1430-9A178CF9B4AD}"/>
+            </a:ext>
+          </a:extLst>
+        </p:cNvPr>
+        <p:cNvGrpSpPr/>
+        <p:nvPr/>
+      </p:nvGrpSpPr>
+      <p:grpSpPr>
+        <a:xfrm>
+          <a:off x="0" y="0"/>
+          <a:ext cx="0" cy="0"/>
+          <a:chOff x="0" y="0"/>
+          <a:chExt cx="0" cy="0"/>
+        </a:xfrm>
+      </p:grpSpPr>
+      <p:grpSp>
+        <p:nvGrpSpPr>
+          <p:cNvPr id="4" name="Group 3">
+            <a:extLst>
+              <a:ext uri="{FF2B5EF4-FFF2-40B4-BE49-F238E27FC236}">
+                <a16:creationId xmlns:a16="http://schemas.microsoft.com/office/drawing/2014/main" id="{B3954BDB-39C5-6761-6565-B58BB4675906}"/>
+              </a:ext>
+            </a:extLst>
+          </p:cNvPr>
+          <p:cNvGrpSpPr/>
+          <p:nvPr/>
+        </p:nvGrpSpPr>
+        <p:grpSpPr>
+          <a:xfrm>
+            <a:off x="1363980" y="775855"/>
+            <a:ext cx="8908454" cy="4094615"/>
+            <a:chOff x="1363980" y="775855"/>
+            <a:chExt cx="8908454" cy="4094615"/>
+          </a:xfrm>
+        </p:grpSpPr>
+        <p:sp>
+          <p:nvSpPr>
+            <p:cNvPr id="6" name="Rectangle 5">
+              <a:extLst>
+                <a:ext uri="{FF2B5EF4-FFF2-40B4-BE49-F238E27FC236}">
+                  <a16:creationId xmlns:a16="http://schemas.microsoft.com/office/drawing/2014/main" id="{7A770446-7B72-AB9B-1E08-ABE86AF0945F}"/>
+                </a:ext>
+              </a:extLst>
+            </p:cNvPr>
+            <p:cNvSpPr/>
+            <p:nvPr/>
+          </p:nvSpPr>
+          <p:spPr>
+            <a:xfrm>
+              <a:off x="1363980" y="775855"/>
+              <a:ext cx="8908454" cy="4094615"/>
+            </a:xfrm>
+            <a:prstGeom prst="rect">
+              <a:avLst/>
+            </a:prstGeom>
+            <a:solidFill>
+              <a:schemeClr val="bg1"/>
+            </a:solidFill>
+            <a:ln>
+              <a:solidFill>
+                <a:schemeClr val="bg1"/>
+              </a:solidFill>
+            </a:ln>
+          </p:spPr>
+          <p:style>
+            <a:lnRef idx="2">
+              <a:schemeClr val="accent1">
+                <a:shade val="15000"/>
+              </a:schemeClr>
+            </a:lnRef>
+            <a:fillRef idx="1">
+              <a:schemeClr val="accent1"/>
+            </a:fillRef>
+            <a:effectRef idx="0">
+              <a:schemeClr val="accent1"/>
+            </a:effectRef>
+            <a:fontRef idx="minor">
+              <a:schemeClr val="lt1"/>
+            </a:fontRef>
+          </p:style>
+          <p:txBody>
+            <a:bodyPr rtlCol="0" anchor="ctr"/>
+            <a:lstStyle/>
+            <a:p>
+              <a:pPr algn="ctr"/>
+              <a:endParaRPr lang="en-US"/>
+            </a:p>
+          </p:txBody>
+        </p:sp>
+        <p:pic>
+          <p:nvPicPr>
+            <p:cNvPr id="3" name="Picture 2">
+              <a:extLst>
+                <a:ext uri="{FF2B5EF4-FFF2-40B4-BE49-F238E27FC236}">
+                  <a16:creationId xmlns:a16="http://schemas.microsoft.com/office/drawing/2014/main" id="{AF5EDB4B-A8A5-7BE6-B1CC-EFC3ACAA0361}"/>
+                </a:ext>
+              </a:extLst>
+            </p:cNvPr>
+            <p:cNvPicPr>
+              <a:picLocks noChangeAspect="1"/>
+            </p:cNvPicPr>
+            <p:nvPr/>
+          </p:nvPicPr>
+          <p:blipFill>
+            <a:blip r:embed="rId2">
+              <a:extLst>
+                <a:ext uri="{28A0092B-C50C-407E-A947-70E740481C1C}">
+                  <a14:useLocalDpi xmlns:a14="http://schemas.microsoft.com/office/drawing/2010/main" val="0"/>
+                </a:ext>
+              </a:extLst>
+            </a:blip>
+            <a:srcRect l="12451" r="25589" b="3955"/>
+            <a:stretch/>
+          </p:blipFill>
+          <p:spPr>
+            <a:xfrm>
+              <a:off x="6743487" y="1169261"/>
+              <a:ext cx="3399358" cy="3512970"/>
+            </a:xfrm>
+            <a:prstGeom prst="rect">
+              <a:avLst/>
+            </a:prstGeom>
+          </p:spPr>
+        </p:pic>
+        <p:grpSp>
+          <p:nvGrpSpPr>
+            <p:cNvPr id="32" name="Group 31">
+              <a:extLst>
+                <a:ext uri="{FF2B5EF4-FFF2-40B4-BE49-F238E27FC236}">
+                  <a16:creationId xmlns:a16="http://schemas.microsoft.com/office/drawing/2014/main" id="{7CF31055-FA49-B393-4E92-9E3E0DA1AC92}"/>
+                </a:ext>
+              </a:extLst>
+            </p:cNvPr>
+            <p:cNvGrpSpPr/>
+            <p:nvPr/>
+          </p:nvGrpSpPr>
+          <p:grpSpPr>
+            <a:xfrm>
+              <a:off x="1449898" y="1177714"/>
+              <a:ext cx="5293589" cy="3657607"/>
+              <a:chOff x="3753997" y="792820"/>
+              <a:chExt cx="5293588" cy="3657607"/>
+            </a:xfrm>
+          </p:grpSpPr>
+          <p:pic>
+            <p:nvPicPr>
+              <p:cNvPr id="9" name="Picture 8">
+                <a:extLst>
+                  <a:ext uri="{FF2B5EF4-FFF2-40B4-BE49-F238E27FC236}">
+                    <a16:creationId xmlns:a16="http://schemas.microsoft.com/office/drawing/2014/main" id="{E080E1CE-E683-C260-B768-3FBF8EF66E47}"/>
+                  </a:ext>
+                </a:extLst>
+              </p:cNvPr>
+              <p:cNvPicPr>
+                <a:picLocks noChangeAspect="1"/>
+              </p:cNvPicPr>
+              <p:nvPr/>
+            </p:nvPicPr>
+            <p:blipFill>
+              <a:blip r:embed="rId3">
+                <a:extLst>
+                  <a:ext uri="{28A0092B-C50C-407E-A947-70E740481C1C}">
+                    <a14:useLocalDpi xmlns:a14="http://schemas.microsoft.com/office/drawing/2010/main" val="0"/>
+                  </a:ext>
+                </a:extLst>
+              </a:blip>
+              <a:srcRect r="3514"/>
+              <a:stretch/>
+            </p:blipFill>
+            <p:spPr>
+              <a:xfrm>
+                <a:off x="3753997" y="792820"/>
+                <a:ext cx="5293588" cy="3657607"/>
+              </a:xfrm>
+              <a:prstGeom prst="rect">
+                <a:avLst/>
+              </a:prstGeom>
+            </p:spPr>
+          </p:pic>
+          <p:sp>
+            <p:nvSpPr>
+              <p:cNvPr id="28" name="Rectangle 27">
+                <a:extLst>
+                  <a:ext uri="{FF2B5EF4-FFF2-40B4-BE49-F238E27FC236}">
+                    <a16:creationId xmlns:a16="http://schemas.microsoft.com/office/drawing/2014/main" id="{1B853129-8B3F-133B-380C-559B8E849EE3}"/>
+                  </a:ext>
+                </a:extLst>
+              </p:cNvPr>
+              <p:cNvSpPr/>
+              <p:nvPr/>
+            </p:nvSpPr>
+            <p:spPr>
+              <a:xfrm>
+                <a:off x="4855844" y="2127885"/>
+                <a:ext cx="1577049" cy="438150"/>
+              </a:xfrm>
+              <a:prstGeom prst="rect">
+                <a:avLst/>
+              </a:prstGeom>
+              <a:solidFill>
+                <a:schemeClr val="bg1"/>
+              </a:solidFill>
+              <a:ln w="3175">
+                <a:solidFill>
+                  <a:schemeClr val="bg1"/>
+                </a:solidFill>
+              </a:ln>
+            </p:spPr>
+            <p:style>
+              <a:lnRef idx="2">
+                <a:schemeClr val="accent1">
+                  <a:shade val="15000"/>
+                </a:schemeClr>
+              </a:lnRef>
+              <a:fillRef idx="1">
+                <a:schemeClr val="accent1"/>
+              </a:fillRef>
+              <a:effectRef idx="0">
+                <a:schemeClr val="accent1"/>
+              </a:effectRef>
+              <a:fontRef idx="minor">
+                <a:schemeClr val="lt1"/>
+              </a:fontRef>
+            </p:style>
+            <p:txBody>
+              <a:bodyPr rtlCol="0" anchor="ctr"/>
+              <a:lstStyle/>
+              <a:p>
+                <a:pPr algn="ctr"/>
+                <a:endParaRPr lang="en-US"/>
+              </a:p>
+            </p:txBody>
+          </p:sp>
+          <p:sp>
+            <p:nvSpPr>
+              <p:cNvPr id="29" name="Rectangle 28">
+                <a:extLst>
+                  <a:ext uri="{FF2B5EF4-FFF2-40B4-BE49-F238E27FC236}">
+                    <a16:creationId xmlns:a16="http://schemas.microsoft.com/office/drawing/2014/main" id="{43AEC15B-006C-6E3F-9740-39B5EBA9751B}"/>
+                  </a:ext>
+                </a:extLst>
+              </p:cNvPr>
+              <p:cNvSpPr/>
+              <p:nvPr/>
+            </p:nvSpPr>
+            <p:spPr>
+              <a:xfrm>
+                <a:off x="6362700" y="2066925"/>
+                <a:ext cx="173355" cy="438150"/>
+              </a:xfrm>
+              <a:prstGeom prst="rect">
+                <a:avLst/>
+              </a:prstGeom>
+              <a:solidFill>
+                <a:schemeClr val="bg1"/>
+              </a:solidFill>
+              <a:ln w="3175">
+                <a:solidFill>
+                  <a:schemeClr val="bg1"/>
+                </a:solidFill>
+              </a:ln>
+            </p:spPr>
+            <p:style>
+              <a:lnRef idx="2">
+                <a:schemeClr val="accent1">
+                  <a:shade val="15000"/>
+                </a:schemeClr>
+              </a:lnRef>
+              <a:fillRef idx="1">
+                <a:schemeClr val="accent1"/>
+              </a:fillRef>
+              <a:effectRef idx="0">
+                <a:schemeClr val="accent1"/>
+              </a:effectRef>
+              <a:fontRef idx="minor">
+                <a:schemeClr val="lt1"/>
+              </a:fontRef>
+            </p:style>
+            <p:txBody>
+              <a:bodyPr rtlCol="0" anchor="ctr"/>
+              <a:lstStyle/>
+              <a:p>
+                <a:pPr algn="ctr"/>
+                <a:endParaRPr lang="en-US"/>
+              </a:p>
+            </p:txBody>
+          </p:sp>
+          <p:sp>
+            <p:nvSpPr>
+              <p:cNvPr id="30" name="Rectangle 29">
+                <a:extLst>
+                  <a:ext uri="{FF2B5EF4-FFF2-40B4-BE49-F238E27FC236}">
+                    <a16:creationId xmlns:a16="http://schemas.microsoft.com/office/drawing/2014/main" id="{0AFC96CB-27C0-DC85-A61A-50C4656E06C3}"/>
+                  </a:ext>
+                </a:extLst>
+              </p:cNvPr>
+              <p:cNvSpPr/>
+              <p:nvPr/>
+            </p:nvSpPr>
+            <p:spPr>
+              <a:xfrm>
+                <a:off x="4863672" y="971550"/>
+                <a:ext cx="1718012" cy="1182644"/>
+              </a:xfrm>
+              <a:prstGeom prst="rect">
+                <a:avLst/>
+              </a:prstGeom>
+              <a:solidFill>
+                <a:schemeClr val="bg1"/>
+              </a:solidFill>
+              <a:ln w="3175">
+                <a:solidFill>
+                  <a:schemeClr val="bg1"/>
+                </a:solidFill>
+              </a:ln>
+            </p:spPr>
+            <p:style>
+              <a:lnRef idx="2">
+                <a:schemeClr val="accent1">
+                  <a:shade val="15000"/>
+                </a:schemeClr>
+              </a:lnRef>
+              <a:fillRef idx="1">
+                <a:schemeClr val="accent1"/>
+              </a:fillRef>
+              <a:effectRef idx="0">
+                <a:schemeClr val="accent1"/>
+              </a:effectRef>
+              <a:fontRef idx="minor">
+                <a:schemeClr val="lt1"/>
+              </a:fontRef>
+            </p:style>
+            <p:txBody>
+              <a:bodyPr rtlCol="0" anchor="ctr"/>
+              <a:lstStyle/>
+              <a:p>
+                <a:pPr algn="ctr"/>
+                <a:endParaRPr lang="en-US"/>
+              </a:p>
+            </p:txBody>
+          </p:sp>
+          <p:grpSp>
+            <p:nvGrpSpPr>
+              <p:cNvPr id="26" name="Group 25">
+                <a:extLst>
+                  <a:ext uri="{FF2B5EF4-FFF2-40B4-BE49-F238E27FC236}">
+                    <a16:creationId xmlns:a16="http://schemas.microsoft.com/office/drawing/2014/main" id="{CAA0B247-2CAD-F0FA-B106-C50782D9032F}"/>
+                  </a:ext>
+                </a:extLst>
+              </p:cNvPr>
+              <p:cNvGrpSpPr/>
+              <p:nvPr/>
+            </p:nvGrpSpPr>
+            <p:grpSpPr>
+              <a:xfrm>
+                <a:off x="4864594" y="971551"/>
+                <a:ext cx="1899820" cy="1361373"/>
+                <a:chOff x="7255162" y="944880"/>
+                <a:chExt cx="1973536" cy="1414197"/>
+              </a:xfrm>
+              <a:solidFill>
+                <a:schemeClr val="bg1"/>
+              </a:solidFill>
+            </p:grpSpPr>
+            <p:sp>
+              <p:nvSpPr>
+                <p:cNvPr id="10" name="Rectangle: Rounded Corners 9">
+                  <a:extLst>
+                    <a:ext uri="{FF2B5EF4-FFF2-40B4-BE49-F238E27FC236}">
+                      <a16:creationId xmlns:a16="http://schemas.microsoft.com/office/drawing/2014/main" id="{51B8907D-C0C4-FCF9-30F3-782D63670325}"/>
+                    </a:ext>
+                  </a:extLst>
+                </p:cNvPr>
+                <p:cNvSpPr/>
+                <p:nvPr/>
+              </p:nvSpPr>
+              <p:spPr>
+                <a:xfrm>
+                  <a:off x="7255162" y="944880"/>
+                  <a:ext cx="1973536" cy="1414197"/>
+                </a:xfrm>
+                <a:prstGeom prst="roundRect">
+                  <a:avLst>
+                    <a:gd name="adj" fmla="val 6330"/>
+                  </a:avLst>
+                </a:prstGeom>
+                <a:grpFill/>
+                <a:ln>
+                  <a:solidFill>
+                    <a:schemeClr val="bg1">
+                      <a:lumMod val="85000"/>
+                    </a:schemeClr>
+                  </a:solidFill>
+                </a:ln>
+              </p:spPr>
+              <p:style>
+                <a:lnRef idx="2">
+                  <a:schemeClr val="accent1">
+                    <a:shade val="15000"/>
+                  </a:schemeClr>
+                </a:lnRef>
+                <a:fillRef idx="1">
+                  <a:schemeClr val="accent1"/>
+                </a:fillRef>
+                <a:effectRef idx="0">
+                  <a:schemeClr val="accent1"/>
+                </a:effectRef>
+                <a:fontRef idx="minor">
+                  <a:schemeClr val="lt1"/>
+                </a:fontRef>
+              </p:style>
+              <p:txBody>
+                <a:bodyPr rtlCol="0" anchor="ctr"/>
+                <a:lstStyle/>
+                <a:p>
+                  <a:pPr algn="ctr"/>
+                  <a:endParaRPr lang="en-US" sz="1600" dirty="0"/>
+                </a:p>
+              </p:txBody>
+            </p:sp>
+            <p:pic>
+              <p:nvPicPr>
+                <p:cNvPr id="11" name="Picture 10">
+                  <a:extLst>
+                    <a:ext uri="{FF2B5EF4-FFF2-40B4-BE49-F238E27FC236}">
+                      <a16:creationId xmlns:a16="http://schemas.microsoft.com/office/drawing/2014/main" id="{60253607-EFD0-AF38-9A32-2AC481DAA6DD}"/>
+                    </a:ext>
+                  </a:extLst>
+                </p:cNvPr>
+                <p:cNvPicPr>
+                  <a:picLocks noChangeAspect="1"/>
+                </p:cNvPicPr>
+                <p:nvPr/>
+              </p:nvPicPr>
+              <p:blipFill>
+                <a:blip r:embed="rId3">
+                  <a:extLst>
+                    <a:ext uri="{28A0092B-C50C-407E-A947-70E740481C1C}">
+                      <a14:useLocalDpi xmlns:a14="http://schemas.microsoft.com/office/drawing/2010/main" val="0"/>
+                    </a:ext>
+                  </a:extLst>
+                </a:blip>
+                <a:srcRect l="22688" t="15435" r="74419" b="63446"/>
+                <a:stretch/>
+              </p:blipFill>
+              <p:spPr>
+                <a:xfrm>
+                  <a:off x="7458126" y="1352167"/>
+                  <a:ext cx="192409" cy="936602"/>
+                </a:xfrm>
+                <a:prstGeom prst="rect">
+                  <a:avLst/>
+                </a:prstGeom>
+                <a:grpFill/>
+                <a:ln>
+                  <a:solidFill>
+                    <a:schemeClr val="bg1"/>
+                  </a:solidFill>
+                </a:ln>
+              </p:spPr>
+            </p:pic>
+            <p:sp>
+              <p:nvSpPr>
+                <p:cNvPr id="12" name="TextBox 11">
+                  <a:extLst>
+                    <a:ext uri="{FF2B5EF4-FFF2-40B4-BE49-F238E27FC236}">
+                      <a16:creationId xmlns:a16="http://schemas.microsoft.com/office/drawing/2014/main" id="{83ED8698-ADD2-D6AD-2999-8BE8920A0B4F}"/>
+                    </a:ext>
+                  </a:extLst>
+                </p:cNvPr>
+                <p:cNvSpPr txBox="1"/>
+                <p:nvPr/>
+              </p:nvSpPr>
+              <p:spPr>
+                <a:xfrm>
+                  <a:off x="7640836" y="1281859"/>
+                  <a:ext cx="964285" cy="991128"/>
+                </a:xfrm>
+                <a:prstGeom prst="rect">
+                  <a:avLst/>
+                </a:prstGeom>
+                <a:grpFill/>
+                <a:ln>
+                  <a:solidFill>
+                    <a:schemeClr val="bg1"/>
+                  </a:solidFill>
+                </a:ln>
+              </p:spPr>
+              <p:txBody>
+                <a:bodyPr wrap="none" rtlCol="0">
+                  <a:spAutoFit/>
+                </a:bodyPr>
+                <a:lstStyle/>
+                <a:p>
+                  <a:pPr algn="ctr"/>
+                  <a:r>
+                    <a:rPr lang="en-US" sz="1400" dirty="0"/>
+                    <a:t>Mixed C</a:t>
+                  </a:r>
+                </a:p>
+                <a:p>
+                  <a:pPr algn="ctr"/>
+                  <a:r>
+                    <a:rPr lang="en-US" sz="1400" dirty="0"/>
+                    <a:t>Mixed WT</a:t>
+                  </a:r>
+                </a:p>
+                <a:p>
+                  <a:pPr algn="ctr"/>
+                  <a:r>
+                    <a:rPr lang="en-US" sz="1400" dirty="0"/>
+                    <a:t>Pure C</a:t>
+                  </a:r>
+                </a:p>
+                <a:p>
+                  <a:pPr algn="ctr"/>
+                  <a:r>
+                    <a:rPr lang="en-US" sz="1400" dirty="0"/>
+                    <a:t>Pure WT</a:t>
+                  </a:r>
+                </a:p>
+              </p:txBody>
+            </p:sp>
+            <p:pic>
+              <p:nvPicPr>
+                <p:cNvPr id="16" name="Picture 15">
+                  <a:extLst>
+                    <a:ext uri="{FF2B5EF4-FFF2-40B4-BE49-F238E27FC236}">
+                      <a16:creationId xmlns:a16="http://schemas.microsoft.com/office/drawing/2014/main" id="{6BE72056-CE7F-0369-0F0A-1C72880C47C0}"/>
+                    </a:ext>
+                  </a:extLst>
+                </p:cNvPr>
+                <p:cNvPicPr>
+                  <a:picLocks noChangeAspect="1"/>
+                </p:cNvPicPr>
+                <p:nvPr/>
+              </p:nvPicPr>
+              <p:blipFill>
+                <a:blip r:embed="rId4"/>
+                <a:stretch>
+                  <a:fillRect/>
+                </a:stretch>
+              </p:blipFill>
+              <p:spPr>
+                <a:xfrm>
+                  <a:off x="8607618" y="1367464"/>
+                  <a:ext cx="396096" cy="198048"/>
+                </a:xfrm>
+                <a:prstGeom prst="rect">
+                  <a:avLst/>
+                </a:prstGeom>
+                <a:grpFill/>
+                <a:ln>
+                  <a:solidFill>
+                    <a:schemeClr val="bg1"/>
+                  </a:solidFill>
+                </a:ln>
+              </p:spPr>
+            </p:pic>
+            <p:pic>
+              <p:nvPicPr>
+                <p:cNvPr id="18" name="Picture 17">
+                  <a:extLst>
+                    <a:ext uri="{FF2B5EF4-FFF2-40B4-BE49-F238E27FC236}">
+                      <a16:creationId xmlns:a16="http://schemas.microsoft.com/office/drawing/2014/main" id="{E82DE025-055D-0D98-D1FD-F9EDA555650E}"/>
+                    </a:ext>
+                  </a:extLst>
+                </p:cNvPr>
+                <p:cNvPicPr>
+                  <a:picLocks noChangeAspect="1"/>
+                </p:cNvPicPr>
+                <p:nvPr/>
+              </p:nvPicPr>
+              <p:blipFill>
+                <a:blip r:embed="rId5"/>
+                <a:stretch>
+                  <a:fillRect/>
+                </a:stretch>
+              </p:blipFill>
+              <p:spPr>
+                <a:xfrm>
+                  <a:off x="8612568" y="1595342"/>
+                  <a:ext cx="386195" cy="198049"/>
+                </a:xfrm>
+                <a:prstGeom prst="rect">
+                  <a:avLst/>
+                </a:prstGeom>
+                <a:grpFill/>
+                <a:ln>
+                  <a:solidFill>
+                    <a:schemeClr val="bg1"/>
+                  </a:solidFill>
+                </a:ln>
+              </p:spPr>
+            </p:pic>
+            <p:pic>
+              <p:nvPicPr>
+                <p:cNvPr id="20" name="Picture 19">
+                  <a:extLst>
+                    <a:ext uri="{FF2B5EF4-FFF2-40B4-BE49-F238E27FC236}">
+                      <a16:creationId xmlns:a16="http://schemas.microsoft.com/office/drawing/2014/main" id="{6D340A23-05BF-5A79-AA35-C16D7F5A30E3}"/>
+                    </a:ext>
+                  </a:extLst>
+                </p:cNvPr>
+                <p:cNvPicPr>
+                  <a:picLocks noChangeAspect="1"/>
+                </p:cNvPicPr>
+                <p:nvPr/>
+              </p:nvPicPr>
+              <p:blipFill>
+                <a:blip r:embed="rId6"/>
+                <a:srcRect t="63438"/>
+                <a:stretch/>
+              </p:blipFill>
+              <p:spPr>
+                <a:xfrm>
+                  <a:off x="8604049" y="1898848"/>
+                  <a:ext cx="409506" cy="122422"/>
+                </a:xfrm>
+                <a:prstGeom prst="rect">
+                  <a:avLst/>
+                </a:prstGeom>
+                <a:grpFill/>
+                <a:ln>
+                  <a:solidFill>
+                    <a:schemeClr val="bg1"/>
+                  </a:solidFill>
+                </a:ln>
+              </p:spPr>
+            </p:pic>
+            <p:pic>
+              <p:nvPicPr>
+                <p:cNvPr id="22" name="Picture 21">
+                  <a:extLst>
+                    <a:ext uri="{FF2B5EF4-FFF2-40B4-BE49-F238E27FC236}">
+                      <a16:creationId xmlns:a16="http://schemas.microsoft.com/office/drawing/2014/main" id="{0A4B80C9-CFEE-6DF6-A18D-0D5E108F6069}"/>
+                    </a:ext>
+                  </a:extLst>
+                </p:cNvPr>
+                <p:cNvPicPr>
+                  <a:picLocks noChangeAspect="1"/>
+                </p:cNvPicPr>
+                <p:nvPr/>
+              </p:nvPicPr>
+              <p:blipFill>
+                <a:blip r:embed="rId6"/>
+                <a:srcRect b="73597"/>
+                <a:stretch/>
+              </p:blipFill>
+              <p:spPr>
+                <a:xfrm>
+                  <a:off x="8607618" y="2150953"/>
+                  <a:ext cx="396096" cy="85510"/>
+                </a:xfrm>
+                <a:prstGeom prst="rect">
+                  <a:avLst/>
+                </a:prstGeom>
+                <a:grpFill/>
+                <a:ln>
+                  <a:solidFill>
+                    <a:schemeClr val="bg1"/>
+                  </a:solidFill>
+                </a:ln>
+              </p:spPr>
+            </p:pic>
+            <p:sp>
+              <p:nvSpPr>
+                <p:cNvPr id="23" name="TextBox 22">
+                  <a:extLst>
+                    <a:ext uri="{FF2B5EF4-FFF2-40B4-BE49-F238E27FC236}">
+                      <a16:creationId xmlns:a16="http://schemas.microsoft.com/office/drawing/2014/main" id="{9368B964-5929-2864-7C3A-B179C517DAA3}"/>
+                    </a:ext>
+                  </a:extLst>
+                </p:cNvPr>
+                <p:cNvSpPr txBox="1"/>
+                <p:nvPr/>
+              </p:nvSpPr>
+              <p:spPr>
+                <a:xfrm>
+                  <a:off x="7286596" y="982835"/>
+                  <a:ext cx="515014" cy="351690"/>
+                </a:xfrm>
+                <a:prstGeom prst="rect">
+                  <a:avLst/>
+                </a:prstGeom>
+                <a:grpFill/>
+                <a:ln>
+                  <a:solidFill>
+                    <a:schemeClr val="bg1"/>
+                  </a:solidFill>
+                </a:ln>
+              </p:spPr>
+              <p:txBody>
+                <a:bodyPr wrap="none" rtlCol="0">
+                  <a:spAutoFit/>
+                </a:bodyPr>
+                <a:lstStyle/>
+                <a:p>
+                  <a:r>
+                    <a:rPr lang="en-US" sz="1600" dirty="0"/>
+                    <a:t>exp</a:t>
+                  </a:r>
+                </a:p>
+              </p:txBody>
+            </p:sp>
+            <p:sp>
+              <p:nvSpPr>
+                <p:cNvPr id="24" name="TextBox 23">
+                  <a:extLst>
+                    <a:ext uri="{FF2B5EF4-FFF2-40B4-BE49-F238E27FC236}">
+                      <a16:creationId xmlns:a16="http://schemas.microsoft.com/office/drawing/2014/main" id="{21D4EEF6-E589-63FE-509B-7A3BD0C2EB34}"/>
+                    </a:ext>
+                  </a:extLst>
+                </p:cNvPr>
+                <p:cNvSpPr txBox="1"/>
+                <p:nvPr/>
+              </p:nvSpPr>
+              <p:spPr>
+                <a:xfrm>
+                  <a:off x="8409243" y="996651"/>
+                  <a:ext cx="777982" cy="351690"/>
+                </a:xfrm>
+                <a:prstGeom prst="rect">
+                  <a:avLst/>
+                </a:prstGeom>
+                <a:grpFill/>
+                <a:ln>
+                  <a:solidFill>
+                    <a:schemeClr val="bg1"/>
+                  </a:solidFill>
+                </a:ln>
+              </p:spPr>
+              <p:txBody>
+                <a:bodyPr wrap="none" rtlCol="0">
+                  <a:spAutoFit/>
+                </a:bodyPr>
+                <a:lstStyle/>
+                <a:p>
+                  <a:r>
+                    <a:rPr lang="en-US" sz="1600" dirty="0"/>
+                    <a:t>model</a:t>
+                  </a:r>
+                </a:p>
+              </p:txBody>
+            </p:sp>
+          </p:grpSp>
+        </p:grpSp>
+        <p:sp>
+          <p:nvSpPr>
+            <p:cNvPr id="7" name="TextBox 6">
+              <a:extLst>
+                <a:ext uri="{FF2B5EF4-FFF2-40B4-BE49-F238E27FC236}">
+                  <a16:creationId xmlns:a16="http://schemas.microsoft.com/office/drawing/2014/main" id="{B7759635-D5AE-D99A-9DC6-C1E585F857BF}"/>
+                </a:ext>
+              </a:extLst>
+            </p:cNvPr>
+            <p:cNvSpPr txBox="1"/>
+            <p:nvPr/>
+          </p:nvSpPr>
+          <p:spPr>
+            <a:xfrm>
+              <a:off x="1653124" y="886803"/>
+              <a:ext cx="586122" cy="523220"/>
+            </a:xfrm>
+            <a:prstGeom prst="rect">
+              <a:avLst/>
+            </a:prstGeom>
+            <a:noFill/>
+            <a:ln>
+              <a:noFill/>
+            </a:ln>
+          </p:spPr>
+          <p:txBody>
+            <a:bodyPr wrap="none" rtlCol="0">
+              <a:spAutoFit/>
+            </a:bodyPr>
+            <a:lstStyle/>
+            <a:p>
+              <a:r>
+                <a:rPr lang="en-US" sz="2800" dirty="0"/>
+                <a:t>(a)</a:t>
+              </a:r>
+            </a:p>
+          </p:txBody>
+        </p:sp>
+        <p:sp>
+          <p:nvSpPr>
+            <p:cNvPr id="8" name="TextBox 7">
+              <a:extLst>
+                <a:ext uri="{FF2B5EF4-FFF2-40B4-BE49-F238E27FC236}">
+                  <a16:creationId xmlns:a16="http://schemas.microsoft.com/office/drawing/2014/main" id="{7DB7263C-98E7-4465-9214-DB3F23550504}"/>
+                </a:ext>
+              </a:extLst>
+            </p:cNvPr>
+            <p:cNvSpPr txBox="1"/>
+            <p:nvPr/>
+          </p:nvSpPr>
+          <p:spPr>
+            <a:xfrm>
+              <a:off x="6637189" y="886803"/>
+              <a:ext cx="598241" cy="523220"/>
+            </a:xfrm>
+            <a:prstGeom prst="rect">
+              <a:avLst/>
+            </a:prstGeom>
+            <a:noFill/>
+            <a:ln>
+              <a:noFill/>
+            </a:ln>
+          </p:spPr>
+          <p:txBody>
+            <a:bodyPr wrap="none" rtlCol="0">
+              <a:spAutoFit/>
+            </a:bodyPr>
+            <a:lstStyle/>
+            <a:p>
+              <a:r>
+                <a:rPr lang="en-US" sz="2800" dirty="0"/>
+                <a:t>(b)</a:t>
+              </a:r>
+            </a:p>
+          </p:txBody>
+        </p:sp>
+      </p:grpSp>
+    </p:spTree>
+    <p:extLst>
+      <p:ext uri="{BB962C8B-B14F-4D97-AF65-F5344CB8AC3E}">
+        <p14:creationId xmlns:p14="http://schemas.microsoft.com/office/powerpoint/2010/main" val="1807449347"/>
       </p:ext>
     </p:extLst>
   </p:cSld>
